--- a/Мышка для людей с ОВЗ/Документы/Презентация о манипуляторе другая.pptx
+++ b/Мышка для людей с ОВЗ/Документы/Презентация о манипуляторе другая.pptx
@@ -280,7 +280,7 @@
           <a:p>
             <a:fld id="{BB72D5D3-D9D5-4A9C-867E-F13F5DA2FF7F}" type="datetimeFigureOut">
               <a:rPr lang="ru-RU" smtClean="0"/>
-              <a:t>10.02.2026</a:t>
+              <a:t>23.04.2026</a:t>
             </a:fld>
             <a:endParaRPr lang="ru-RU"/>
           </a:p>
@@ -450,7 +450,7 @@
           <a:p>
             <a:fld id="{BB72D5D3-D9D5-4A9C-867E-F13F5DA2FF7F}" type="datetimeFigureOut">
               <a:rPr lang="ru-RU" smtClean="0"/>
-              <a:t>10.02.2026</a:t>
+              <a:t>23.04.2026</a:t>
             </a:fld>
             <a:endParaRPr lang="ru-RU"/>
           </a:p>
@@ -630,7 +630,7 @@
           <a:p>
             <a:fld id="{BB72D5D3-D9D5-4A9C-867E-F13F5DA2FF7F}" type="datetimeFigureOut">
               <a:rPr lang="ru-RU" smtClean="0"/>
-              <a:t>10.02.2026</a:t>
+              <a:t>23.04.2026</a:t>
             </a:fld>
             <a:endParaRPr lang="ru-RU"/>
           </a:p>
@@ -800,7 +800,7 @@
           <a:p>
             <a:fld id="{BB72D5D3-D9D5-4A9C-867E-F13F5DA2FF7F}" type="datetimeFigureOut">
               <a:rPr lang="ru-RU" smtClean="0"/>
-              <a:t>10.02.2026</a:t>
+              <a:t>23.04.2026</a:t>
             </a:fld>
             <a:endParaRPr lang="ru-RU"/>
           </a:p>
@@ -1046,7 +1046,7 @@
           <a:p>
             <a:fld id="{BB72D5D3-D9D5-4A9C-867E-F13F5DA2FF7F}" type="datetimeFigureOut">
               <a:rPr lang="ru-RU" smtClean="0"/>
-              <a:t>10.02.2026</a:t>
+              <a:t>23.04.2026</a:t>
             </a:fld>
             <a:endParaRPr lang="ru-RU"/>
           </a:p>
@@ -1278,7 +1278,7 @@
           <a:p>
             <a:fld id="{BB72D5D3-D9D5-4A9C-867E-F13F5DA2FF7F}" type="datetimeFigureOut">
               <a:rPr lang="ru-RU" smtClean="0"/>
-              <a:t>10.02.2026</a:t>
+              <a:t>23.04.2026</a:t>
             </a:fld>
             <a:endParaRPr lang="ru-RU"/>
           </a:p>
@@ -1645,7 +1645,7 @@
           <a:p>
             <a:fld id="{BB72D5D3-D9D5-4A9C-867E-F13F5DA2FF7F}" type="datetimeFigureOut">
               <a:rPr lang="ru-RU" smtClean="0"/>
-              <a:t>10.02.2026</a:t>
+              <a:t>23.04.2026</a:t>
             </a:fld>
             <a:endParaRPr lang="ru-RU"/>
           </a:p>
@@ -1763,7 +1763,7 @@
           <a:p>
             <a:fld id="{BB72D5D3-D9D5-4A9C-867E-F13F5DA2FF7F}" type="datetimeFigureOut">
               <a:rPr lang="ru-RU" smtClean="0"/>
-              <a:t>10.02.2026</a:t>
+              <a:t>23.04.2026</a:t>
             </a:fld>
             <a:endParaRPr lang="ru-RU"/>
           </a:p>
@@ -1858,7 +1858,7 @@
           <a:p>
             <a:fld id="{BB72D5D3-D9D5-4A9C-867E-F13F5DA2FF7F}" type="datetimeFigureOut">
               <a:rPr lang="ru-RU" smtClean="0"/>
-              <a:t>10.02.2026</a:t>
+              <a:t>23.04.2026</a:t>
             </a:fld>
             <a:endParaRPr lang="ru-RU"/>
           </a:p>
@@ -2135,7 +2135,7 @@
           <a:p>
             <a:fld id="{BB72D5D3-D9D5-4A9C-867E-F13F5DA2FF7F}" type="datetimeFigureOut">
               <a:rPr lang="ru-RU" smtClean="0"/>
-              <a:t>10.02.2026</a:t>
+              <a:t>23.04.2026</a:t>
             </a:fld>
             <a:endParaRPr lang="ru-RU"/>
           </a:p>
@@ -2388,7 +2388,7 @@
           <a:p>
             <a:fld id="{BB72D5D3-D9D5-4A9C-867E-F13F5DA2FF7F}" type="datetimeFigureOut">
               <a:rPr lang="ru-RU" smtClean="0"/>
-              <a:t>10.02.2026</a:t>
+              <a:t>23.04.2026</a:t>
             </a:fld>
             <a:endParaRPr lang="ru-RU"/>
           </a:p>
@@ -2601,7 +2601,7 @@
           <a:p>
             <a:fld id="{BB72D5D3-D9D5-4A9C-867E-F13F5DA2FF7F}" type="datetimeFigureOut">
               <a:rPr lang="ru-RU" smtClean="0"/>
-              <a:t>10.02.2026</a:t>
+              <a:t>23.04.2026</a:t>
             </a:fld>
             <a:endParaRPr lang="ru-RU"/>
           </a:p>
